--- a/reports/final/WCORE_Final_MK1.pptx
+++ b/reports/final/WCORE_Final_MK1.pptx
@@ -111,7 +111,57 @@
       </a:defRPr>
     </a:lvl9pPr>
   </p:defaultTextStyle>
+  <p:extLst>
+    <p:ext uri="{EFAFB233-063F-42B5-8137-9DF3F51BA10A}">
+      <p15:sldGuideLst xmlns:p15="http://schemas.microsoft.com/office/powerpoint/2012/main"/>
+    </p:ext>
+  </p:extLst>
 </p:presentation>
+</file>
+
+<file path=ppt/revisionInfo.xml><?xml version="1.0" encoding="utf-8"?>
+<p1510:revInfo xmlns:a="http://schemas.openxmlformats.org/drawingml/2006/main" xmlns:r="http://schemas.openxmlformats.org/officeDocument/2006/relationships" xmlns:p1510="http://schemas.microsoft.com/office/powerpoint/2015/10/main">
+  <p1510:revLst>
+    <p1510:client id="{01CC8FD4-58F6-4102-87DD-C4B290A08AFE}" v="1" dt="2026-05-04T10:16:44.149"/>
+  </p1510:revLst>
+</p1510:revInfo>
+</file>
+
+<file path=ppt/changesInfos/changesInfo1.xml><?xml version="1.0" encoding="utf-8"?>
+<pc:chgInfo xmlns:a="http://schemas.openxmlformats.org/drawingml/2006/main" xmlns:r="http://schemas.openxmlformats.org/officeDocument/2006/relationships" xmlns:ac="http://schemas.microsoft.com/office/drawing/2013/main/command" xmlns:pc="http://schemas.microsoft.com/office/powerpoint/2013/main/command">
+  <pc:docChgLst>
+    <pc:chgData name="Corlew, Whitman J" userId="9fba991d-415e-4fd5-aa63-13c14645a838" providerId="ADAL" clId="{30B722A6-EF29-45DC-AC78-AC6B6E1FB3DF}"/>
+    <pc:docChg chg="modSld">
+      <pc:chgData name="Corlew, Whitman J" userId="9fba991d-415e-4fd5-aa63-13c14645a838" providerId="ADAL" clId="{30B722A6-EF29-45DC-AC78-AC6B6E1FB3DF}" dt="2026-05-04T10:16:44.147" v="1" actId="20577"/>
+      <pc:docMkLst>
+        <pc:docMk/>
+      </pc:docMkLst>
+      <pc:sldChg chg="modSp mod">
+        <pc:chgData name="Corlew, Whitman J" userId="9fba991d-415e-4fd5-aa63-13c14645a838" providerId="ADAL" clId="{30B722A6-EF29-45DC-AC78-AC6B6E1FB3DF}" dt="2026-05-04T10:16:44.147" v="1" actId="20577"/>
+        <pc:sldMkLst>
+          <pc:docMk/>
+          <pc:sldMk cId="1499092989" sldId="262"/>
+        </pc:sldMkLst>
+        <pc:spChg chg="mod">
+          <ac:chgData name="Corlew, Whitman J" userId="9fba991d-415e-4fd5-aa63-13c14645a838" providerId="ADAL" clId="{30B722A6-EF29-45DC-AC78-AC6B6E1FB3DF}" dt="2026-05-04T10:16:44.147" v="1" actId="20577"/>
+          <ac:spMkLst>
+            <pc:docMk/>
+            <pc:sldMk cId="1499092989" sldId="262"/>
+            <ac:spMk id="20" creationId="{EFCC8CC0-B1A2-88CD-22AE-9BD66E3B506E}"/>
+          </ac:spMkLst>
+        </pc:spChg>
+        <pc:spChg chg="mod">
+          <ac:chgData name="Corlew, Whitman J" userId="9fba991d-415e-4fd5-aa63-13c14645a838" providerId="ADAL" clId="{30B722A6-EF29-45DC-AC78-AC6B6E1FB3DF}" dt="2026-05-04T10:16:41.135" v="0" actId="14100"/>
+          <ac:spMkLst>
+            <pc:docMk/>
+            <pc:sldMk cId="1499092989" sldId="262"/>
+            <ac:spMk id="23" creationId="{F6ED765E-15E8-EF65-5136-0C45A066A762}"/>
+          </ac:spMkLst>
+        </pc:spChg>
+      </pc:sldChg>
+    </pc:docChg>
+  </pc:docChgLst>
+</pc:chgInfo>
 </file>
 
 <file path=ppt/slideLayouts/slideLayout1.xml><?xml version="1.0" encoding="utf-8"?>
@@ -7065,20 +7115,20 @@
   <p:clrMapOvr>
     <a:masterClrMapping/>
   </p:clrMapOvr>
-  <mc:AlternateContent xmlns:mc="http://schemas.openxmlformats.org/markup-compatibility/2006">
-    <mc:Choice xmlns:p14="http://schemas.microsoft.com/office/powerpoint/2010/main" Requires="p14">
+  <mc:AlternateContent xmlns:mc="http://schemas.openxmlformats.org/markup-compatibility/2006" xmlns:p14="http://schemas.microsoft.com/office/powerpoint/2010/main">
+    <mc:Choice Requires="p14">
       <p:transition spd="slow" p14:dur="1200">
         <p:dissolve/>
       </p:transition>
     </mc:Choice>
-    <mc:Fallback>
+    <mc:Fallback xmlns="">
       <p:transition spd="slow">
         <p:dissolve/>
       </p:transition>
     </mc:Fallback>
   </mc:AlternateContent>
-  <mc:AlternateContent xmlns:mc="http://schemas.openxmlformats.org/markup-compatibility/2006">
-    <mc:Choice xmlns:p14="http://schemas.microsoft.com/office/powerpoint/2010/main" Requires="p14">
+  <mc:AlternateContent xmlns:mc="http://schemas.openxmlformats.org/markup-compatibility/2006" xmlns:p14="http://schemas.microsoft.com/office/powerpoint/2010/main">
+    <mc:Choice Requires="p14">
       <p:timing>
         <p:tnLst>
           <p:par>
@@ -7381,7 +7431,7 @@
         </p:bldLst>
       </p:timing>
     </mc:Choice>
-    <mc:Fallback>
+    <mc:Fallback xmlns="">
       <p:timing>
         <p:tnLst>
           <p:par>
@@ -9039,13 +9089,13 @@
   <p:clrMapOvr>
     <a:masterClrMapping/>
   </p:clrMapOvr>
-  <mc:AlternateContent xmlns:mc="http://schemas.openxmlformats.org/markup-compatibility/2006">
-    <mc:Choice xmlns:p14="http://schemas.microsoft.com/office/powerpoint/2010/main" Requires="p14">
+  <mc:AlternateContent xmlns:mc="http://schemas.openxmlformats.org/markup-compatibility/2006" xmlns:p14="http://schemas.microsoft.com/office/powerpoint/2010/main">
+    <mc:Choice Requires="p14">
       <p:transition spd="slow" p14:dur="3000">
         <p14:shred/>
       </p:transition>
     </mc:Choice>
-    <mc:Fallback>
+    <mc:Fallback xmlns="">
       <p:transition spd="slow">
         <p:fade/>
       </p:transition>
@@ -12162,13 +12212,13 @@
   <p:clrMapOvr>
     <a:masterClrMapping/>
   </p:clrMapOvr>
-  <mc:AlternateContent xmlns:mc="http://schemas.openxmlformats.org/markup-compatibility/2006">
-    <mc:Choice xmlns:p14="http://schemas.microsoft.com/office/powerpoint/2010/main" Requires="p14">
+  <mc:AlternateContent xmlns:mc="http://schemas.openxmlformats.org/markup-compatibility/2006" xmlns:p14="http://schemas.microsoft.com/office/powerpoint/2010/main">
+    <mc:Choice Requires="p14">
       <p:transition spd="slow" p14:dur="800">
         <p:circle/>
       </p:transition>
     </mc:Choice>
-    <mc:Fallback>
+    <mc:Fallback xmlns="">
       <p:transition spd="slow">
         <p:circle/>
       </p:transition>
@@ -13523,13 +13573,13 @@
   <p:clrMapOvr>
     <a:masterClrMapping/>
   </p:clrMapOvr>
-  <mc:AlternateContent xmlns:mc="http://schemas.openxmlformats.org/markup-compatibility/2006">
-    <mc:Choice xmlns:p14="http://schemas.microsoft.com/office/powerpoint/2010/main" Requires="p14">
+  <mc:AlternateContent xmlns:mc="http://schemas.openxmlformats.org/markup-compatibility/2006" xmlns:p14="http://schemas.microsoft.com/office/powerpoint/2010/main">
+    <mc:Choice Requires="p14">
       <p:transition spd="slow" p14:dur="1600">
         <p:blinds dir="vert"/>
       </p:transition>
     </mc:Choice>
-    <mc:Fallback>
+    <mc:Fallback xmlns="">
       <p:transition spd="slow">
         <p:blinds dir="vert"/>
       </p:transition>
@@ -14732,7 +14782,19 @@
               <a:rPr lang="en-US" sz="3200" dirty="0">
                 <a:latin typeface="Univers Condensed" panose="020B0506020202050204" pitchFamily="34" charset="0"/>
               </a:rPr>
-              <a:t>For Your Education and Feeback:</a:t>
+              <a:t>For Your Education </a:t>
+            </a:r>
+            <a:r>
+              <a:rPr lang="en-US" sz="3200">
+                <a:latin typeface="Univers Condensed" panose="020B0506020202050204" pitchFamily="34" charset="0"/>
+              </a:rPr>
+              <a:t>and Feedback</a:t>
+            </a:r>
+            <a:r>
+              <a:rPr lang="en-US" sz="3200" dirty="0">
+                <a:latin typeface="Univers Condensed" panose="020B0506020202050204" pitchFamily="34" charset="0"/>
+              </a:rPr>
+              <a:t>:</a:t>
             </a:r>
           </a:p>
           <a:p>
@@ -14865,8 +14927,8 @@
         </p:nvSpPr>
         <p:spPr>
           <a:xfrm>
-            <a:off x="1562100" y="241300"/>
-            <a:ext cx="8585199" cy="769441"/>
+            <a:off x="1562101" y="241300"/>
+            <a:ext cx="5910416" cy="769441"/>
           </a:xfrm>
           <a:prstGeom prst="rect">
             <a:avLst/>
@@ -14987,13 +15049,13 @@
   <p:clrMapOvr>
     <a:masterClrMapping/>
   </p:clrMapOvr>
-  <mc:AlternateContent xmlns:mc="http://schemas.openxmlformats.org/markup-compatibility/2006">
-    <mc:Choice xmlns:p14="http://schemas.microsoft.com/office/powerpoint/2010/main" Requires="p14">
+  <mc:AlternateContent xmlns:mc="http://schemas.openxmlformats.org/markup-compatibility/2006" xmlns:p14="http://schemas.microsoft.com/office/powerpoint/2010/main">
+    <mc:Choice Requires="p14">
       <p:transition spd="slow" p14:dur="1500">
         <p:split orient="vert"/>
       </p:transition>
     </mc:Choice>
-    <mc:Fallback>
+    <mc:Fallback xmlns="">
       <p:transition spd="slow">
         <p:split orient="vert"/>
       </p:transition>
@@ -18568,13 +18630,13 @@
   <p:clrMapOvr>
     <a:masterClrMapping/>
   </p:clrMapOvr>
-  <mc:AlternateContent xmlns:mc="http://schemas.openxmlformats.org/markup-compatibility/2006">
-    <mc:Choice xmlns:p14="http://schemas.microsoft.com/office/powerpoint/2010/main" Requires="p14">
+  <mc:AlternateContent xmlns:mc="http://schemas.openxmlformats.org/markup-compatibility/2006" xmlns:p14="http://schemas.microsoft.com/office/powerpoint/2010/main">
+    <mc:Choice Requires="p14">
       <p:transition spd="slow" p14:dur="2500">
         <p:checker/>
       </p:transition>
     </mc:Choice>
-    <mc:Fallback>
+    <mc:Fallback xmlns="">
       <p:transition spd="slow">
         <p:checker/>
       </p:transition>

--- a/reports/final/WCORE_Final_MK1.pptx
+++ b/reports/final/WCORE_Final_MK1.pptx
@@ -1,6 +1,6 @@
 
 <file path=ppt/presentation.xml><?xml version="1.0" encoding="utf-8"?>
-<p:presentation xmlns:a="http://schemas.openxmlformats.org/drawingml/2006/main" xmlns:r="http://schemas.openxmlformats.org/officeDocument/2006/relationships" xmlns:p="http://schemas.openxmlformats.org/presentationml/2006/main" saveSubsetFonts="1">
+<p:presentation xmlns:a="http://schemas.openxmlformats.org/drawingml/2006/main" xmlns:r="http://schemas.openxmlformats.org/officeDocument/2006/relationships" xmlns:p="http://schemas.openxmlformats.org/presentationml/2006/main" embedTrueTypeFonts="1">
   <p:sldMasterIdLst>
     <p:sldMasterId id="2147483648" r:id="rId1"/>
   </p:sldMasterIdLst>
@@ -16,6 +16,25 @@
   </p:sldIdLst>
   <p:sldSz cx="12192000" cy="6858000"/>
   <p:notesSz cx="6858000" cy="9144000"/>
+  <p:embeddedFontLst>
+    <p:embeddedFont>
+      <p:font typeface="Univers" panose="020B0503020202020204" pitchFamily="34" charset="0"/>
+      <p:regular r:id="rId10"/>
+    </p:embeddedFont>
+    <p:embeddedFont>
+      <p:font typeface="Univers 75 Black" pitchFamily="50" charset="0"/>
+      <p:bold r:id="rId11"/>
+    </p:embeddedFont>
+    <p:embeddedFont>
+      <p:font typeface="Univers Condensed" panose="020B0506020202050204" pitchFamily="34" charset="0"/>
+      <p:regular r:id="rId12"/>
+      <p:bold r:id="rId13"/>
+    </p:embeddedFont>
+    <p:embeddedFont>
+      <p:font typeface="Univers LT Std 49 Light UltraCn" panose="020B0406020202060204" pitchFamily="34" charset="0"/>
+      <p:regular r:id="rId14"/>
+    </p:embeddedFont>
+  </p:embeddedFontLst>
   <p:defaultTextStyle>
     <a:defPPr>
       <a:defRPr lang="en-US"/>
@@ -119,23 +138,30 @@
 </p:presentation>
 </file>
 
-<file path=ppt/revisionInfo.xml><?xml version="1.0" encoding="utf-8"?>
-<p1510:revInfo xmlns:a="http://schemas.openxmlformats.org/drawingml/2006/main" xmlns:r="http://schemas.openxmlformats.org/officeDocument/2006/relationships" xmlns:p1510="http://schemas.microsoft.com/office/powerpoint/2015/10/main">
-  <p1510:revLst>
-    <p1510:client id="{01CC8FD4-58F6-4102-87DD-C4B290A08AFE}" v="1" dt="2026-05-04T10:16:44.149"/>
-  </p1510:revLst>
-</p1510:revInfo>
-</file>
-
 <file path=ppt/changesInfos/changesInfo1.xml><?xml version="1.0" encoding="utf-8"?>
 <pc:chgInfo xmlns:a="http://schemas.openxmlformats.org/drawingml/2006/main" xmlns:r="http://schemas.openxmlformats.org/officeDocument/2006/relationships" xmlns:ac="http://schemas.microsoft.com/office/drawing/2013/main/command" xmlns:pc="http://schemas.microsoft.com/office/powerpoint/2013/main/command">
   <pc:docChgLst>
     <pc:chgData name="Corlew, Whitman J" userId="9fba991d-415e-4fd5-aa63-13c14645a838" providerId="ADAL" clId="{30B722A6-EF29-45DC-AC78-AC6B6E1FB3DF}"/>
-    <pc:docChg chg="modSld">
-      <pc:chgData name="Corlew, Whitman J" userId="9fba991d-415e-4fd5-aa63-13c14645a838" providerId="ADAL" clId="{30B722A6-EF29-45DC-AC78-AC6B6E1FB3DF}" dt="2026-05-04T10:16:44.147" v="1" actId="20577"/>
+    <pc:docChg chg="custSel modSld">
+      <pc:chgData name="Corlew, Whitman J" userId="9fba991d-415e-4fd5-aa63-13c14645a838" providerId="ADAL" clId="{30B722A6-EF29-45DC-AC78-AC6B6E1FB3DF}" dt="2026-05-10T21:29:28.653" v="3" actId="478"/>
       <pc:docMkLst>
         <pc:docMk/>
       </pc:docMkLst>
+      <pc:sldChg chg="delSp mod">
+        <pc:chgData name="Corlew, Whitman J" userId="9fba991d-415e-4fd5-aa63-13c14645a838" providerId="ADAL" clId="{30B722A6-EF29-45DC-AC78-AC6B6E1FB3DF}" dt="2026-05-10T21:29:28.653" v="3" actId="478"/>
+        <pc:sldMkLst>
+          <pc:docMk/>
+          <pc:sldMk cId="811527583" sldId="260"/>
+        </pc:sldMkLst>
+        <pc:graphicFrameChg chg="del">
+          <ac:chgData name="Corlew, Whitman J" userId="9fba991d-415e-4fd5-aa63-13c14645a838" providerId="ADAL" clId="{30B722A6-EF29-45DC-AC78-AC6B6E1FB3DF}" dt="2026-05-10T21:29:28.653" v="3" actId="478"/>
+          <ac:graphicFrameMkLst>
+            <pc:docMk/>
+            <pc:sldMk cId="811527583" sldId="260"/>
+            <ac:graphicFrameMk id="2" creationId="{B517E240-A750-60F9-A779-B14226BA8853}"/>
+          </ac:graphicFrameMkLst>
+        </pc:graphicFrameChg>
+      </pc:sldChg>
       <pc:sldChg chg="modSp mod">
         <pc:chgData name="Corlew, Whitman J" userId="9fba991d-415e-4fd5-aa63-13c14645a838" providerId="ADAL" clId="{30B722A6-EF29-45DC-AC78-AC6B6E1FB3DF}" dt="2026-05-04T10:16:44.147" v="1" actId="20577"/>
         <pc:sldMkLst>
@@ -158,6 +184,21 @@
             <ac:spMk id="23" creationId="{F6ED765E-15E8-EF65-5136-0C45A066A762}"/>
           </ac:spMkLst>
         </pc:spChg>
+      </pc:sldChg>
+      <pc:sldChg chg="delSp mod">
+        <pc:chgData name="Corlew, Whitman J" userId="9fba991d-415e-4fd5-aa63-13c14645a838" providerId="ADAL" clId="{30B722A6-EF29-45DC-AC78-AC6B6E1FB3DF}" dt="2026-05-10T21:29:26.319" v="2" actId="478"/>
+        <pc:sldMkLst>
+          <pc:docMk/>
+          <pc:sldMk cId="3303013197" sldId="263"/>
+        </pc:sldMkLst>
+        <pc:graphicFrameChg chg="del">
+          <ac:chgData name="Corlew, Whitman J" userId="9fba991d-415e-4fd5-aa63-13c14645a838" providerId="ADAL" clId="{30B722A6-EF29-45DC-AC78-AC6B6E1FB3DF}" dt="2026-05-10T21:29:26.319" v="2" actId="478"/>
+          <ac:graphicFrameMkLst>
+            <pc:docMk/>
+            <pc:sldMk cId="3303013197" sldId="263"/>
+            <ac:graphicFrameMk id="28" creationId="{2D86DF4F-7935-70E3-77FE-5B20ACAA203A}"/>
+          </ac:graphicFrameMkLst>
+        </pc:graphicFrameChg>
       </pc:sldChg>
     </pc:docChg>
   </pc:docChgLst>
@@ -311,7 +352,7 @@
           <a:p>
             <a:fld id="{6597AECE-5A9A-4926-9111-17A178CCDE85}" type="datetimeFigureOut">
               <a:rPr lang="en-US" smtClean="0"/>
-              <a:t>5/4/2026</a:t>
+              <a:t>5/10/2026</a:t>
             </a:fld>
             <a:endParaRPr lang="en-US"/>
           </a:p>
@@ -509,7 +550,7 @@
           <a:p>
             <a:fld id="{6597AECE-5A9A-4926-9111-17A178CCDE85}" type="datetimeFigureOut">
               <a:rPr lang="en-US" smtClean="0"/>
-              <a:t>5/4/2026</a:t>
+              <a:t>5/10/2026</a:t>
             </a:fld>
             <a:endParaRPr lang="en-US"/>
           </a:p>
@@ -717,7 +758,7 @@
           <a:p>
             <a:fld id="{6597AECE-5A9A-4926-9111-17A178CCDE85}" type="datetimeFigureOut">
               <a:rPr lang="en-US" smtClean="0"/>
-              <a:t>5/4/2026</a:t>
+              <a:t>5/10/2026</a:t>
             </a:fld>
             <a:endParaRPr lang="en-US"/>
           </a:p>
@@ -915,7 +956,7 @@
           <a:p>
             <a:fld id="{6597AECE-5A9A-4926-9111-17A178CCDE85}" type="datetimeFigureOut">
               <a:rPr lang="en-US" smtClean="0"/>
-              <a:t>5/4/2026</a:t>
+              <a:t>5/10/2026</a:t>
             </a:fld>
             <a:endParaRPr lang="en-US"/>
           </a:p>
@@ -1190,7 +1231,7 @@
           <a:p>
             <a:fld id="{6597AECE-5A9A-4926-9111-17A178CCDE85}" type="datetimeFigureOut">
               <a:rPr lang="en-US" smtClean="0"/>
-              <a:t>5/4/2026</a:t>
+              <a:t>5/10/2026</a:t>
             </a:fld>
             <a:endParaRPr lang="en-US"/>
           </a:p>
@@ -1455,7 +1496,7 @@
           <a:p>
             <a:fld id="{6597AECE-5A9A-4926-9111-17A178CCDE85}" type="datetimeFigureOut">
               <a:rPr lang="en-US" smtClean="0"/>
-              <a:t>5/4/2026</a:t>
+              <a:t>5/10/2026</a:t>
             </a:fld>
             <a:endParaRPr lang="en-US"/>
           </a:p>
@@ -1867,7 +1908,7 @@
           <a:p>
             <a:fld id="{6597AECE-5A9A-4926-9111-17A178CCDE85}" type="datetimeFigureOut">
               <a:rPr lang="en-US" smtClean="0"/>
-              <a:t>5/4/2026</a:t>
+              <a:t>5/10/2026</a:t>
             </a:fld>
             <a:endParaRPr lang="en-US"/>
           </a:p>
@@ -2008,7 +2049,7 @@
           <a:p>
             <a:fld id="{6597AECE-5A9A-4926-9111-17A178CCDE85}" type="datetimeFigureOut">
               <a:rPr lang="en-US" smtClean="0"/>
-              <a:t>5/4/2026</a:t>
+              <a:t>5/10/2026</a:t>
             </a:fld>
             <a:endParaRPr lang="en-US"/>
           </a:p>
@@ -2121,7 +2162,7 @@
           <a:p>
             <a:fld id="{6597AECE-5A9A-4926-9111-17A178CCDE85}" type="datetimeFigureOut">
               <a:rPr lang="en-US" smtClean="0"/>
-              <a:t>5/4/2026</a:t>
+              <a:t>5/10/2026</a:t>
             </a:fld>
             <a:endParaRPr lang="en-US"/>
           </a:p>
@@ -2432,7 +2473,7 @@
           <a:p>
             <a:fld id="{6597AECE-5A9A-4926-9111-17A178CCDE85}" type="datetimeFigureOut">
               <a:rPr lang="en-US" smtClean="0"/>
-              <a:t>5/4/2026</a:t>
+              <a:t>5/10/2026</a:t>
             </a:fld>
             <a:endParaRPr lang="en-US"/>
           </a:p>
@@ -2720,7 +2761,7 @@
           <a:p>
             <a:fld id="{6597AECE-5A9A-4926-9111-17A178CCDE85}" type="datetimeFigureOut">
               <a:rPr lang="en-US" smtClean="0"/>
-              <a:t>5/4/2026</a:t>
+              <a:t>5/10/2026</a:t>
             </a:fld>
             <a:endParaRPr lang="en-US"/>
           </a:p>
@@ -2961,7 +3002,7 @@
           <a:p>
             <a:fld id="{6597AECE-5A9A-4926-9111-17A178CCDE85}" type="datetimeFigureOut">
               <a:rPr lang="en-US" smtClean="0"/>
-              <a:t>5/4/2026</a:t>
+              <a:t>5/10/2026</a:t>
             </a:fld>
             <a:endParaRPr lang="en-US"/>
           </a:p>
@@ -11824,130 +11865,6 @@
           </a:fontRef>
         </p:style>
       </p:cxnSp>
-      <mc:AlternateContent xmlns:mc="http://schemas.openxmlformats.org/markup-compatibility/2006">
-        <mc:Choice xmlns:am3d="http://schemas.microsoft.com/office/drawing/2017/model3d" Requires="am3d">
-          <p:graphicFrame>
-            <p:nvGraphicFramePr>
-              <p:cNvPr id="2" name="3D Model 1">
-                <a:extLst>
-                  <a:ext uri="{FF2B5EF4-FFF2-40B4-BE49-F238E27FC236}">
-                    <a16:creationId xmlns:a16="http://schemas.microsoft.com/office/drawing/2014/main" id="{B517E240-A750-60F9-A779-B14226BA8853}"/>
-                  </a:ext>
-                </a:extLst>
-              </p:cNvPr>
-              <p:cNvGraphicFramePr>
-                <a:graphicFrameLocks noChangeAspect="1"/>
-              </p:cNvGraphicFramePr>
-              <p:nvPr>
-                <p:extLst>
-                  <p:ext uri="{D42A27DB-BD31-4B8C-83A1-F6EECF244321}">
-                    <p14:modId xmlns:p14="http://schemas.microsoft.com/office/powerpoint/2010/main" val="1555066070"/>
-                  </p:ext>
-                </p:extLst>
-              </p:nvPr>
-            </p:nvGraphicFramePr>
-            <p:xfrm>
-              <a:off x="7986658" y="2247850"/>
-              <a:ext cx="2760240" cy="4549639"/>
-            </p:xfrm>
-            <a:graphic>
-              <a:graphicData uri="http://schemas.microsoft.com/office/drawing/2017/model3d">
-                <am3d:model3d r:embed="rId3">
-                  <am3d:spPr>
-                    <a:xfrm>
-                      <a:off x="0" y="0"/>
-                      <a:ext cx="2760240" cy="4549639"/>
-                    </a:xfrm>
-                    <a:prstGeom prst="rect">
-                      <a:avLst/>
-                    </a:prstGeom>
-                  </am3d:spPr>
-                  <am3d:camera>
-                    <am3d:pos x="0" y="0" z="59597328"/>
-                    <am3d:up dx="0" dy="36000000" dz="0"/>
-                    <am3d:lookAt x="0" y="0" z="0"/>
-                    <am3d:perspective fov="2700000"/>
-                  </am3d:camera>
-                  <am3d:trans>
-                    <am3d:meterPerModelUnit n="32456" d="1000000"/>
-                    <am3d:preTrans dx="0" dy="0" dz="-18039143"/>
-                    <am3d:scale>
-                      <am3d:sx n="1000000" d="1000000"/>
-                      <am3d:sy n="1000000" d="1000000"/>
-                      <am3d:sz n="1000000" d="1000000"/>
-                    </am3d:scale>
-                    <am3d:rot ax="251690" ay="-1631854" az="-115201"/>
-                    <am3d:postTrans dx="0" dy="0" dz="0"/>
-                  </am3d:trans>
-                  <am3d:raster rName="Office3DRenderer" rVer="16.0.8326">
-                    <am3d:blip r:embed="rId4"/>
-                  </am3d:raster>
-                  <am3d:objViewport viewportSz="5311082"/>
-                  <am3d:ambientLight>
-                    <am3d:clr>
-                      <a:scrgbClr r="50000" g="50000" b="50000"/>
-                    </am3d:clr>
-                    <am3d:illuminance n="500000" d="1000000"/>
-                  </am3d:ambientLight>
-                  <am3d:ptLight rad="0">
-                    <am3d:clr>
-                      <a:scrgbClr r="100000" g="75000" b="50000"/>
-                    </am3d:clr>
-                    <am3d:intensity n="9765625" d="1000000"/>
-                    <am3d:pos x="21959998" y="70920001" z="16344003"/>
-                  </am3d:ptLight>
-                  <am3d:ptLight rad="0">
-                    <am3d:clr>
-                      <a:scrgbClr r="40000" g="60000" b="95000"/>
-                    </am3d:clr>
-                    <am3d:intensity n="12250000" d="1000000"/>
-                    <am3d:pos x="-37964106" y="51130435" z="57631972"/>
-                  </am3d:ptLight>
-                  <am3d:ptLight rad="0">
-                    <am3d:clr>
-                      <a:scrgbClr r="86837" g="72700" b="100000"/>
-                    </am3d:clr>
-                    <am3d:intensity n="3125000" d="1000000"/>
-                    <am3d:pos x="-37739122" y="58056624" z="-34769649"/>
-                  </am3d:ptLight>
-                </am3d:model3d>
-              </a:graphicData>
-            </a:graphic>
-          </p:graphicFrame>
-        </mc:Choice>
-        <mc:Fallback>
-          <p:pic>
-            <p:nvPicPr>
-              <p:cNvPr id="2" name="3D Model 1">
-                <a:extLst>
-                  <a:ext uri="{FF2B5EF4-FFF2-40B4-BE49-F238E27FC236}">
-                    <a16:creationId xmlns:a16="http://schemas.microsoft.com/office/drawing/2014/main" id="{B517E240-A750-60F9-A779-B14226BA8853}"/>
-                  </a:ext>
-                </a:extLst>
-              </p:cNvPr>
-              <p:cNvPicPr>
-                <a:picLocks noGrp="1" noRot="1" noChangeAspect="1" noMove="1" noResize="1" noEditPoints="1" noAdjustHandles="1" noChangeArrowheads="1" noChangeShapeType="1" noCrop="1"/>
-              </p:cNvPicPr>
-              <p:nvPr/>
-            </p:nvPicPr>
-            <p:blipFill>
-              <a:blip r:embed="rId4"/>
-              <a:stretch>
-                <a:fillRect/>
-              </a:stretch>
-            </p:blipFill>
-            <p:spPr>
-              <a:xfrm>
-                <a:off x="7986658" y="2247850"/>
-                <a:ext cx="2760240" cy="4549639"/>
-              </a:xfrm>
-              <a:prstGeom prst="rect">
-                <a:avLst/>
-              </a:prstGeom>
-            </p:spPr>
-          </p:pic>
-        </mc:Fallback>
-      </mc:AlternateContent>
     </p:spTree>
     <p:extLst>
       <p:ext uri="{BB962C8B-B14F-4D97-AF65-F5344CB8AC3E}">
@@ -18496,130 +18413,6 @@
           </a:p>
         </p:txBody>
       </p:sp>
-      <mc:AlternateContent xmlns:mc="http://schemas.openxmlformats.org/markup-compatibility/2006">
-        <mc:Choice xmlns:am3d="http://schemas.microsoft.com/office/drawing/2017/model3d" Requires="am3d">
-          <p:graphicFrame>
-            <p:nvGraphicFramePr>
-              <p:cNvPr id="28" name="3D Model 27">
-                <a:extLst>
-                  <a:ext uri="{FF2B5EF4-FFF2-40B4-BE49-F238E27FC236}">
-                    <a16:creationId xmlns:a16="http://schemas.microsoft.com/office/drawing/2014/main" id="{2D86DF4F-7935-70E3-77FE-5B20ACAA203A}"/>
-                  </a:ext>
-                </a:extLst>
-              </p:cNvPr>
-              <p:cNvGraphicFramePr>
-                <a:graphicFrameLocks noChangeAspect="1"/>
-              </p:cNvGraphicFramePr>
-              <p:nvPr>
-                <p:extLst>
-                  <p:ext uri="{D42A27DB-BD31-4B8C-83A1-F6EECF244321}">
-                    <p14:modId xmlns:p14="http://schemas.microsoft.com/office/powerpoint/2010/main" val="552150307"/>
-                  </p:ext>
-                </p:extLst>
-              </p:nvPr>
-            </p:nvGraphicFramePr>
-            <p:xfrm>
-              <a:off x="6469289" y="4138560"/>
-              <a:ext cx="3910919" cy="2730982"/>
-            </p:xfrm>
-            <a:graphic>
-              <a:graphicData uri="http://schemas.microsoft.com/office/drawing/2017/model3d">
-                <am3d:model3d r:embed="rId2">
-                  <am3d:spPr>
-                    <a:xfrm>
-                      <a:off x="0" y="0"/>
-                      <a:ext cx="3910919" cy="2730982"/>
-                    </a:xfrm>
-                    <a:prstGeom prst="rect">
-                      <a:avLst/>
-                    </a:prstGeom>
-                  </am3d:spPr>
-                  <am3d:camera>
-                    <am3d:pos x="0" y="0" z="64656819"/>
-                    <am3d:up dx="0" dy="36000000" dz="0"/>
-                    <am3d:lookAt x="0" y="0" z="0"/>
-                    <am3d:perspective fov="2700000"/>
-                  </am3d:camera>
-                  <am3d:trans>
-                    <am3d:meterPerModelUnit n="65189" d="1000000"/>
-                    <am3d:preTrans dx="11" dy="24136" dz="-10679854"/>
-                    <am3d:scale>
-                      <am3d:sx n="1000000" d="1000000"/>
-                      <am3d:sy n="1000000" d="1000000"/>
-                      <am3d:sz n="1000000" d="1000000"/>
-                    </am3d:scale>
-                    <am3d:rot ax="1387632" ay="-199448" az="-85114"/>
-                    <am3d:postTrans dx="0" dy="0" dz="0"/>
-                  </am3d:trans>
-                  <am3d:raster rName="Office3DRenderer" rVer="16.0.8326">
-                    <am3d:blip r:embed="rId3"/>
-                  </am3d:raster>
-                  <am3d:objViewport viewportSz="5281167"/>
-                  <am3d:ambientLight>
-                    <am3d:clr>
-                      <a:scrgbClr r="50000" g="50000" b="50000"/>
-                    </am3d:clr>
-                    <am3d:illuminance n="500000" d="1000000"/>
-                  </am3d:ambientLight>
-                  <am3d:ptLight rad="0">
-                    <am3d:clr>
-                      <a:scrgbClr r="100000" g="75000" b="50000"/>
-                    </am3d:clr>
-                    <am3d:intensity n="9765625" d="1000000"/>
-                    <am3d:pos x="21959998" y="70920001" z="16344003"/>
-                  </am3d:ptLight>
-                  <am3d:ptLight rad="0">
-                    <am3d:clr>
-                      <a:scrgbClr r="40000" g="60000" b="95000"/>
-                    </am3d:clr>
-                    <am3d:intensity n="12250000" d="1000000"/>
-                    <am3d:pos x="-37964106" y="51130435" z="57631972"/>
-                  </am3d:ptLight>
-                  <am3d:ptLight rad="0">
-                    <am3d:clr>
-                      <a:scrgbClr r="86837" g="72700" b="100000"/>
-                    </am3d:clr>
-                    <am3d:intensity n="3125000" d="1000000"/>
-                    <am3d:pos x="-37739122" y="58056624" z="-34769649"/>
-                  </am3d:ptLight>
-                </am3d:model3d>
-              </a:graphicData>
-            </a:graphic>
-          </p:graphicFrame>
-        </mc:Choice>
-        <mc:Fallback>
-          <p:pic>
-            <p:nvPicPr>
-              <p:cNvPr id="28" name="3D Model 27">
-                <a:extLst>
-                  <a:ext uri="{FF2B5EF4-FFF2-40B4-BE49-F238E27FC236}">
-                    <a16:creationId xmlns:a16="http://schemas.microsoft.com/office/drawing/2014/main" id="{2D86DF4F-7935-70E3-77FE-5B20ACAA203A}"/>
-                  </a:ext>
-                </a:extLst>
-              </p:cNvPr>
-              <p:cNvPicPr>
-                <a:picLocks noGrp="1" noRot="1" noChangeAspect="1" noMove="1" noResize="1" noEditPoints="1" noAdjustHandles="1" noChangeArrowheads="1" noChangeShapeType="1" noCrop="1"/>
-              </p:cNvPicPr>
-              <p:nvPr/>
-            </p:nvPicPr>
-            <p:blipFill>
-              <a:blip r:embed="rId3"/>
-              <a:stretch>
-                <a:fillRect/>
-              </a:stretch>
-            </p:blipFill>
-            <p:spPr>
-              <a:xfrm>
-                <a:off x="6469289" y="4138560"/>
-                <a:ext cx="3910919" cy="2730982"/>
-              </a:xfrm>
-              <a:prstGeom prst="rect">
-                <a:avLst/>
-              </a:prstGeom>
-            </p:spPr>
-          </p:pic>
-        </mc:Fallback>
-      </mc:AlternateContent>
     </p:spTree>
     <p:extLst>
       <p:ext uri="{BB962C8B-B14F-4D97-AF65-F5344CB8AC3E}">
